--- a/ゲーム科2年/00_前期/ゲーム開発Ⅰ/06_プレイヤーの移動.pptx
+++ b/ゲーム科2年/00_前期/ゲーム開発Ⅰ/06_プレイヤーの移動.pptx
@@ -268,7 +268,7 @@
           <a:p>
             <a:fld id="{E9CC885B-4903-4D54-9A93-00025F12DED9}" type="datetimeFigureOut">
               <a:rPr kumimoji="1" lang="ja-JP" altLang="en-US" smtClean="0"/>
-              <a:t>2024/9/26</a:t>
+              <a:t>2026/2/4</a:t>
             </a:fld>
             <a:endParaRPr kumimoji="1" lang="ja-JP" altLang="en-US"/>
           </a:p>
@@ -498,7 +498,7 @@
           <a:p>
             <a:fld id="{E9CC885B-4903-4D54-9A93-00025F12DED9}" type="datetimeFigureOut">
               <a:rPr kumimoji="1" lang="ja-JP" altLang="en-US" smtClean="0"/>
-              <a:t>2024/9/26</a:t>
+              <a:t>2026/2/4</a:t>
             </a:fld>
             <a:endParaRPr kumimoji="1" lang="ja-JP" altLang="en-US"/>
           </a:p>
@@ -738,7 +738,7 @@
           <a:p>
             <a:fld id="{E9CC885B-4903-4D54-9A93-00025F12DED9}" type="datetimeFigureOut">
               <a:rPr kumimoji="1" lang="ja-JP" altLang="en-US" smtClean="0"/>
-              <a:t>2024/9/26</a:t>
+              <a:t>2026/2/4</a:t>
             </a:fld>
             <a:endParaRPr kumimoji="1" lang="ja-JP" altLang="en-US"/>
           </a:p>
@@ -968,7 +968,7 @@
           <a:p>
             <a:fld id="{E9CC885B-4903-4D54-9A93-00025F12DED9}" type="datetimeFigureOut">
               <a:rPr kumimoji="1" lang="ja-JP" altLang="en-US" smtClean="0"/>
-              <a:t>2024/9/26</a:t>
+              <a:t>2026/2/4</a:t>
             </a:fld>
             <a:endParaRPr kumimoji="1" lang="ja-JP" altLang="en-US"/>
           </a:p>
@@ -1243,7 +1243,7 @@
           <a:p>
             <a:fld id="{E9CC885B-4903-4D54-9A93-00025F12DED9}" type="datetimeFigureOut">
               <a:rPr kumimoji="1" lang="ja-JP" altLang="en-US" smtClean="0"/>
-              <a:t>2024/9/26</a:t>
+              <a:t>2026/2/4</a:t>
             </a:fld>
             <a:endParaRPr kumimoji="1" lang="ja-JP" altLang="en-US"/>
           </a:p>
@@ -1572,7 +1572,7 @@
           <a:p>
             <a:fld id="{E9CC885B-4903-4D54-9A93-00025F12DED9}" type="datetimeFigureOut">
               <a:rPr kumimoji="1" lang="ja-JP" altLang="en-US" smtClean="0"/>
-              <a:t>2024/9/26</a:t>
+              <a:t>2026/2/4</a:t>
             </a:fld>
             <a:endParaRPr kumimoji="1" lang="ja-JP" altLang="en-US"/>
           </a:p>
@@ -2048,7 +2048,7 @@
           <a:p>
             <a:fld id="{E9CC885B-4903-4D54-9A93-00025F12DED9}" type="datetimeFigureOut">
               <a:rPr kumimoji="1" lang="ja-JP" altLang="en-US" smtClean="0"/>
-              <a:t>2024/9/26</a:t>
+              <a:t>2026/2/4</a:t>
             </a:fld>
             <a:endParaRPr kumimoji="1" lang="ja-JP" altLang="en-US"/>
           </a:p>
@@ -2189,7 +2189,7 @@
           <a:p>
             <a:fld id="{E9CC885B-4903-4D54-9A93-00025F12DED9}" type="datetimeFigureOut">
               <a:rPr kumimoji="1" lang="ja-JP" altLang="en-US" smtClean="0"/>
-              <a:t>2024/9/26</a:t>
+              <a:t>2026/2/4</a:t>
             </a:fld>
             <a:endParaRPr kumimoji="1" lang="ja-JP" altLang="en-US"/>
           </a:p>
@@ -2302,7 +2302,7 @@
           <a:p>
             <a:fld id="{E9CC885B-4903-4D54-9A93-00025F12DED9}" type="datetimeFigureOut">
               <a:rPr kumimoji="1" lang="ja-JP" altLang="en-US" smtClean="0"/>
-              <a:t>2024/9/26</a:t>
+              <a:t>2026/2/4</a:t>
             </a:fld>
             <a:endParaRPr kumimoji="1" lang="ja-JP" altLang="en-US"/>
           </a:p>
@@ -2645,7 +2645,7 @@
           <a:p>
             <a:fld id="{E9CC885B-4903-4D54-9A93-00025F12DED9}" type="datetimeFigureOut">
               <a:rPr kumimoji="1" lang="ja-JP" altLang="en-US" smtClean="0"/>
-              <a:t>2024/9/26</a:t>
+              <a:t>2026/2/4</a:t>
             </a:fld>
             <a:endParaRPr kumimoji="1" lang="ja-JP" altLang="en-US"/>
           </a:p>
@@ -2933,7 +2933,7 @@
           <a:p>
             <a:fld id="{E9CC885B-4903-4D54-9A93-00025F12DED9}" type="datetimeFigureOut">
               <a:rPr kumimoji="1" lang="ja-JP" altLang="en-US" smtClean="0"/>
-              <a:t>2024/9/26</a:t>
+              <a:t>2026/2/4</a:t>
             </a:fld>
             <a:endParaRPr kumimoji="1" lang="ja-JP" altLang="en-US"/>
           </a:p>
@@ -3206,7 +3206,7 @@
           <a:p>
             <a:fld id="{E9CC885B-4903-4D54-9A93-00025F12DED9}" type="datetimeFigureOut">
               <a:rPr kumimoji="1" lang="ja-JP" altLang="en-US" smtClean="0"/>
-              <a:t>2024/9/26</a:t>
+              <a:t>2026/2/4</a:t>
             </a:fld>
             <a:endParaRPr kumimoji="1" lang="ja-JP" altLang="en-US"/>
           </a:p>
@@ -6649,10 +6649,10 @@
       </p:sp>
       <p:pic>
         <p:nvPicPr>
-          <p:cNvPr id="3" name="図 2">
-            <a:extLst>
-              <a:ext uri="{FF2B5EF4-FFF2-40B4-BE49-F238E27FC236}">
-                <a16:creationId xmlns:a16="http://schemas.microsoft.com/office/drawing/2014/main" id="{12B680DB-7522-4ECC-B6B8-4580BB353B83}"/>
+          <p:cNvPr id="5" name="図 4">
+            <a:extLst>
+              <a:ext uri="{FF2B5EF4-FFF2-40B4-BE49-F238E27FC236}">
+                <a16:creationId xmlns:a16="http://schemas.microsoft.com/office/drawing/2014/main" id="{8E5C700D-F9E8-4AAE-B94A-0B9BAAC193BA}"/>
               </a:ext>
             </a:extLst>
           </p:cNvPr>
@@ -6662,21 +6662,15 @@
           <p:nvPr/>
         </p:nvPicPr>
         <p:blipFill>
-          <a:blip r:embed="rId2">
-            <a:extLst>
-              <a:ext uri="{28A0092B-C50C-407E-A947-70E740481C1C}">
-                <a14:useLocalDpi xmlns:a14="http://schemas.microsoft.com/office/drawing/2010/main" val="0"/>
-              </a:ext>
-            </a:extLst>
-          </a:blip>
+          <a:blip r:embed="rId2"/>
           <a:stretch>
             <a:fillRect/>
           </a:stretch>
         </p:blipFill>
         <p:spPr>
           <a:xfrm>
-            <a:off x="567541" y="1817794"/>
-            <a:ext cx="7117737" cy="4417906"/>
+            <a:off x="567542" y="1817794"/>
+            <a:ext cx="8148468" cy="4125806"/>
           </a:xfrm>
           <a:prstGeom prst="rect">
             <a:avLst/>
@@ -6685,10 +6679,10 @@
       </p:pic>
       <p:sp>
         <p:nvSpPr>
-          <p:cNvPr id="8" name="正方形/長方形 7">
-            <a:extLst>
-              <a:ext uri="{FF2B5EF4-FFF2-40B4-BE49-F238E27FC236}">
-                <a16:creationId xmlns:a16="http://schemas.microsoft.com/office/drawing/2014/main" id="{E8880F13-3A0A-4B31-96EA-5F2C4220DF09}"/>
+          <p:cNvPr id="9" name="正方形/長方形 8">
+            <a:extLst>
+              <a:ext uri="{FF2B5EF4-FFF2-40B4-BE49-F238E27FC236}">
+                <a16:creationId xmlns:a16="http://schemas.microsoft.com/office/drawing/2014/main" id="{2E01D210-1BF9-4F80-AB2A-6CB00E4B7CE0}"/>
               </a:ext>
             </a:extLst>
           </p:cNvPr>
@@ -6697,7 +6691,7 @@
         </p:nvSpPr>
         <p:spPr>
           <a:xfrm>
-            <a:off x="2301350" y="3912446"/>
+            <a:off x="3139550" y="3960052"/>
             <a:ext cx="5383928" cy="1294553"/>
           </a:xfrm>
           <a:prstGeom prst="rect">
